--- a/tests/fixtures/reference_docs/minimal.pptx
+++ b/tests/fixtures/reference_docs/minimal.pptx
@@ -3123,7 +3123,11 @@
         <p:txBody>
           <a:bodyPr/>
           <a:lstStyle/>
-          <a:p/>
+          <a:p>
+            <a:r>
+              <a:t>Subtitle text</a:t>
+            </a:r>
+          </a:p>
         </p:txBody>
       </p:sp>
     </p:spTree>
